--- a/slides/18-XAI-lab.pptx
+++ b/slides/18-XAI-lab.pptx
@@ -5,13 +5,15 @@
     <p:sldMasterId id="2147483660" r:id="rId1"/>
   </p:sldMasterIdLst>
   <p:notesMasterIdLst>
-    <p:notesMasterId r:id="rId6"/>
+    <p:notesMasterId r:id="rId8"/>
   </p:notesMasterIdLst>
   <p:sldIdLst>
     <p:sldId id="256" r:id="rId2"/>
     <p:sldId id="257" r:id="rId3"/>
-    <p:sldId id="258" r:id="rId4"/>
-    <p:sldId id="259" r:id="rId5"/>
+    <p:sldId id="260" r:id="rId4"/>
+    <p:sldId id="262" r:id="rId5"/>
+    <p:sldId id="258" r:id="rId6"/>
+    <p:sldId id="259" r:id="rId7"/>
   </p:sldIdLst>
   <p:sldSz cx="12192000" cy="6858000"/>
   <p:notesSz cx="6858000" cy="9144000"/>
@@ -200,7 +202,7 @@
           <a:p>
             <a:fld id="{2CD22518-F7FE-2E40-9C60-793856882CE6}" type="datetimeFigureOut">
               <a:rPr lang="en-US" smtClean="0"/>
-              <a:t>2/27/26</a:t>
+              <a:t>4/21/26</a:t>
             </a:fld>
             <a:endParaRPr lang="en-US"/>
           </a:p>
@@ -643,6 +645,225 @@
         <p:cNvPr id="1" name="">
           <a:extLst>
             <a:ext uri="{FF2B5EF4-FFF2-40B4-BE49-F238E27FC236}">
+              <a16:creationId xmlns:a16="http://schemas.microsoft.com/office/drawing/2014/main" id="{897D1C52-8AB0-C0CD-640B-1D1CE810788A}"/>
+            </a:ext>
+          </a:extLst>
+        </p:cNvPr>
+        <p:cNvGrpSpPr/>
+        <p:nvPr/>
+      </p:nvGrpSpPr>
+      <p:grpSpPr>
+        <a:xfrm>
+          <a:off x="0" y="0"/>
+          <a:ext cx="0" cy="0"/>
+          <a:chOff x="0" y="0"/>
+          <a:chExt cx="0" cy="0"/>
+        </a:xfrm>
+      </p:grpSpPr>
+      <p:sp>
+        <p:nvSpPr>
+          <p:cNvPr id="2" name="Slide Image Placeholder 1">
+            <a:extLst>
+              <a:ext uri="{FF2B5EF4-FFF2-40B4-BE49-F238E27FC236}">
+                <a16:creationId xmlns:a16="http://schemas.microsoft.com/office/drawing/2014/main" id="{BE794121-6A1A-EA99-4D5C-C4707EABCCF1}"/>
+              </a:ext>
+            </a:extLst>
+          </p:cNvPr>
+          <p:cNvSpPr>
+            <a:spLocks noGrp="1" noRot="1" noChangeAspect="1"/>
+          </p:cNvSpPr>
+          <p:nvPr>
+            <p:ph type="sldImg"/>
+          </p:nvPr>
+        </p:nvSpPr>
+        <p:spPr/>
+      </p:sp>
+      <p:sp>
+        <p:nvSpPr>
+          <p:cNvPr id="3" name="Notes Placeholder 2">
+            <a:extLst>
+              <a:ext uri="{FF2B5EF4-FFF2-40B4-BE49-F238E27FC236}">
+                <a16:creationId xmlns:a16="http://schemas.microsoft.com/office/drawing/2014/main" id="{A5EBDB37-7CE5-9529-21EB-F02F4FE78C00}"/>
+              </a:ext>
+            </a:extLst>
+          </p:cNvPr>
+          <p:cNvSpPr>
+            <a:spLocks noGrp="1"/>
+          </p:cNvSpPr>
+          <p:nvPr>
+            <p:ph type="body" idx="1"/>
+          </p:nvPr>
+        </p:nvSpPr>
+        <p:spPr/>
+        <p:txBody>
+          <a:bodyPr/>
+          <a:lstStyle/>
+          <a:p>
+            <a:endParaRPr lang="en-US" dirty="0"/>
+          </a:p>
+        </p:txBody>
+      </p:sp>
+      <p:sp>
+        <p:nvSpPr>
+          <p:cNvPr id="4" name="Slide Number Placeholder 3">
+            <a:extLst>
+              <a:ext uri="{FF2B5EF4-FFF2-40B4-BE49-F238E27FC236}">
+                <a16:creationId xmlns:a16="http://schemas.microsoft.com/office/drawing/2014/main" id="{76533B3D-B53A-B60B-9315-8F977613209F}"/>
+              </a:ext>
+            </a:extLst>
+          </p:cNvPr>
+          <p:cNvSpPr>
+            <a:spLocks noGrp="1"/>
+          </p:cNvSpPr>
+          <p:nvPr>
+            <p:ph type="sldNum" sz="quarter" idx="5"/>
+          </p:nvPr>
+        </p:nvSpPr>
+        <p:spPr/>
+        <p:txBody>
+          <a:bodyPr/>
+          <a:lstStyle/>
+          <a:p>
+            <a:fld id="{362CD335-F0CB-D347-B8A5-7AB70F34C34F}" type="slidenum">
+              <a:rPr lang="en-US" smtClean="0"/>
+              <a:t>3</a:t>
+            </a:fld>
+            <a:endParaRPr lang="en-US"/>
+          </a:p>
+        </p:txBody>
+      </p:sp>
+    </p:spTree>
+    <p:extLst>
+      <p:ext uri="{BB962C8B-B14F-4D97-AF65-F5344CB8AC3E}">
+        <p14:creationId xmlns:p14="http://schemas.microsoft.com/office/powerpoint/2010/main" val="3709207831"/>
+      </p:ext>
+    </p:extLst>
+  </p:cSld>
+  <p:clrMapOvr>
+    <a:masterClrMapping/>
+  </p:clrMapOvr>
+</p:notes>
+</file>
+
+<file path=ppt/notesSlides/notesSlide4.xml><?xml version="1.0" encoding="utf-8"?>
+<p:notes xmlns:a="http://schemas.openxmlformats.org/drawingml/2006/main" xmlns:r="http://schemas.openxmlformats.org/officeDocument/2006/relationships" xmlns:p="http://schemas.openxmlformats.org/presentationml/2006/main">
+  <p:cSld>
+    <p:spTree>
+      <p:nvGrpSpPr>
+        <p:cNvPr id="1" name="">
+          <a:extLst>
+            <a:ext uri="{FF2B5EF4-FFF2-40B4-BE49-F238E27FC236}">
+              <a16:creationId xmlns:a16="http://schemas.microsoft.com/office/drawing/2014/main" id="{89C8F378-6AAC-D8CD-02D3-D44FEFB40EF3}"/>
+            </a:ext>
+          </a:extLst>
+        </p:cNvPr>
+        <p:cNvGrpSpPr/>
+        <p:nvPr/>
+      </p:nvGrpSpPr>
+      <p:grpSpPr>
+        <a:xfrm>
+          <a:off x="0" y="0"/>
+          <a:ext cx="0" cy="0"/>
+          <a:chOff x="0" y="0"/>
+          <a:chExt cx="0" cy="0"/>
+        </a:xfrm>
+      </p:grpSpPr>
+      <p:sp>
+        <p:nvSpPr>
+          <p:cNvPr id="2" name="Slide Image Placeholder 1">
+            <a:extLst>
+              <a:ext uri="{FF2B5EF4-FFF2-40B4-BE49-F238E27FC236}">
+                <a16:creationId xmlns:a16="http://schemas.microsoft.com/office/drawing/2014/main" id="{6AAA523B-E528-D297-6D8A-31EED3100C0F}"/>
+              </a:ext>
+            </a:extLst>
+          </p:cNvPr>
+          <p:cNvSpPr>
+            <a:spLocks noGrp="1" noRot="1" noChangeAspect="1"/>
+          </p:cNvSpPr>
+          <p:nvPr>
+            <p:ph type="sldImg"/>
+          </p:nvPr>
+        </p:nvSpPr>
+        <p:spPr/>
+      </p:sp>
+      <p:sp>
+        <p:nvSpPr>
+          <p:cNvPr id="3" name="Notes Placeholder 2">
+            <a:extLst>
+              <a:ext uri="{FF2B5EF4-FFF2-40B4-BE49-F238E27FC236}">
+                <a16:creationId xmlns:a16="http://schemas.microsoft.com/office/drawing/2014/main" id="{F0D7CB17-DBFA-0A9E-161D-3E0CFCD83229}"/>
+              </a:ext>
+            </a:extLst>
+          </p:cNvPr>
+          <p:cNvSpPr>
+            <a:spLocks noGrp="1"/>
+          </p:cNvSpPr>
+          <p:nvPr>
+            <p:ph type="body" idx="1"/>
+          </p:nvPr>
+        </p:nvSpPr>
+        <p:spPr/>
+        <p:txBody>
+          <a:bodyPr/>
+          <a:lstStyle/>
+          <a:p>
+            <a:r>
+              <a:rPr lang="en-US" dirty="0"/>
+              <a:t>The red boxes present a typical AI pipeline with four trust components in green. Lastly, the vivid yellow nodes refer to the research objectives (O1–O4) associated with the related results</a:t>
+            </a:r>
+          </a:p>
+        </p:txBody>
+      </p:sp>
+      <p:sp>
+        <p:nvSpPr>
+          <p:cNvPr id="4" name="Slide Number Placeholder 3">
+            <a:extLst>
+              <a:ext uri="{FF2B5EF4-FFF2-40B4-BE49-F238E27FC236}">
+                <a16:creationId xmlns:a16="http://schemas.microsoft.com/office/drawing/2014/main" id="{02CDCD0A-6DCB-8472-7977-CF2A2B4006EB}"/>
+              </a:ext>
+            </a:extLst>
+          </p:cNvPr>
+          <p:cNvSpPr>
+            <a:spLocks noGrp="1"/>
+          </p:cNvSpPr>
+          <p:nvPr>
+            <p:ph type="sldNum" sz="quarter" idx="5"/>
+          </p:nvPr>
+        </p:nvSpPr>
+        <p:spPr/>
+        <p:txBody>
+          <a:bodyPr/>
+          <a:lstStyle/>
+          <a:p>
+            <a:fld id="{362CD335-F0CB-D347-B8A5-7AB70F34C34F}" type="slidenum">
+              <a:rPr lang="en-US" smtClean="0"/>
+              <a:t>4</a:t>
+            </a:fld>
+            <a:endParaRPr lang="en-US"/>
+          </a:p>
+        </p:txBody>
+      </p:sp>
+    </p:spTree>
+    <p:extLst>
+      <p:ext uri="{BB962C8B-B14F-4D97-AF65-F5344CB8AC3E}">
+        <p14:creationId xmlns:p14="http://schemas.microsoft.com/office/powerpoint/2010/main" val="2298121987"/>
+      </p:ext>
+    </p:extLst>
+  </p:cSld>
+  <p:clrMapOvr>
+    <a:masterClrMapping/>
+  </p:clrMapOvr>
+</p:notes>
+</file>
+
+<file path=ppt/notesSlides/notesSlide5.xml><?xml version="1.0" encoding="utf-8"?>
+<p:notes xmlns:a="http://schemas.openxmlformats.org/drawingml/2006/main" xmlns:r="http://schemas.openxmlformats.org/officeDocument/2006/relationships" xmlns:p="http://schemas.openxmlformats.org/presentationml/2006/main">
+  <p:cSld>
+    <p:spTree>
+      <p:nvGrpSpPr>
+        <p:cNvPr id="1" name="">
+          <a:extLst>
+            <a:ext uri="{FF2B5EF4-FFF2-40B4-BE49-F238E27FC236}">
               <a16:creationId xmlns:a16="http://schemas.microsoft.com/office/drawing/2014/main" id="{E4B8EE41-EAF8-1306-DB0E-1FA10326A822}"/>
             </a:ext>
           </a:extLst>
@@ -724,7 +945,7 @@
           <a:p>
             <a:fld id="{362CD335-F0CB-D347-B8A5-7AB70F34C34F}" type="slidenum">
               <a:rPr lang="en-US" smtClean="0"/>
-              <a:t>3</a:t>
+              <a:t>5</a:t>
             </a:fld>
             <a:endParaRPr lang="en-US"/>
           </a:p>
@@ -743,7 +964,7 @@
 </p:notes>
 </file>
 
-<file path=ppt/notesSlides/notesSlide4.xml><?xml version="1.0" encoding="utf-8"?>
+<file path=ppt/notesSlides/notesSlide6.xml><?xml version="1.0" encoding="utf-8"?>
 <p:notes xmlns:a="http://schemas.openxmlformats.org/drawingml/2006/main" xmlns:r="http://schemas.openxmlformats.org/officeDocument/2006/relationships" xmlns:p="http://schemas.openxmlformats.org/presentationml/2006/main">
   <p:cSld>
     <p:spTree>
@@ -832,7 +1053,7 @@
           <a:p>
             <a:fld id="{362CD335-F0CB-D347-B8A5-7AB70F34C34F}" type="slidenum">
               <a:rPr lang="en-US" smtClean="0"/>
-              <a:t>4</a:t>
+              <a:t>6</a:t>
             </a:fld>
             <a:endParaRPr lang="en-US"/>
           </a:p>
@@ -1104,7 +1325,7 @@
             <a:fld id="{B61BEF0D-F0BB-DE4B-95CE-6DB70DBA9567}" type="datetimeFigureOut">
               <a:rPr lang="en-US" smtClean="0"/>
               <a:pPr/>
-              <a:t>2/27/26</a:t>
+              <a:t>4/21/26</a:t>
             </a:fld>
             <a:endParaRPr lang="en-US" dirty="0"/>
           </a:p>
@@ -1368,7 +1589,7 @@
             <a:fld id="{B61BEF0D-F0BB-DE4B-95CE-6DB70DBA9567}" type="datetimeFigureOut">
               <a:rPr lang="en-US" smtClean="0"/>
               <a:pPr/>
-              <a:t>2/27/26</a:t>
+              <a:t>4/21/26</a:t>
             </a:fld>
             <a:endParaRPr lang="en-US" dirty="0"/>
           </a:p>
@@ -1605,7 +1826,7 @@
             <a:fld id="{B61BEF0D-F0BB-DE4B-95CE-6DB70DBA9567}" type="datetimeFigureOut">
               <a:rPr lang="en-US" smtClean="0"/>
               <a:pPr/>
-              <a:t>2/27/26</a:t>
+              <a:t>4/21/26</a:t>
             </a:fld>
             <a:endParaRPr lang="en-US" dirty="0"/>
           </a:p>
@@ -1854,7 +2075,7 @@
             <a:fld id="{B61BEF0D-F0BB-DE4B-95CE-6DB70DBA9567}" type="datetimeFigureOut">
               <a:rPr lang="en-US" smtClean="0"/>
               <a:pPr/>
-              <a:t>2/27/26</a:t>
+              <a:t>4/21/26</a:t>
             </a:fld>
             <a:endParaRPr lang="en-US" dirty="0"/>
           </a:p>
@@ -2163,7 +2384,7 @@
             <a:fld id="{B61BEF0D-F0BB-DE4B-95CE-6DB70DBA9567}" type="datetimeFigureOut">
               <a:rPr lang="en-US" smtClean="0"/>
               <a:pPr/>
-              <a:t>2/27/26</a:t>
+              <a:t>4/21/26</a:t>
             </a:fld>
             <a:endParaRPr lang="en-US" dirty="0"/>
           </a:p>
@@ -2474,7 +2695,7 @@
             <a:fld id="{B61BEF0D-F0BB-DE4B-95CE-6DB70DBA9567}" type="datetimeFigureOut">
               <a:rPr lang="en-US" smtClean="0"/>
               <a:pPr/>
-              <a:t>2/27/26</a:t>
+              <a:t>4/21/26</a:t>
             </a:fld>
             <a:endParaRPr lang="en-US" dirty="0"/>
           </a:p>
@@ -2898,7 +3119,7 @@
             <a:fld id="{B61BEF0D-F0BB-DE4B-95CE-6DB70DBA9567}" type="datetimeFigureOut">
               <a:rPr lang="en-US" smtClean="0"/>
               <a:pPr/>
-              <a:t>2/27/26</a:t>
+              <a:t>4/21/26</a:t>
             </a:fld>
             <a:endParaRPr lang="en-US" dirty="0"/>
           </a:p>
@@ -2995,7 +3216,7 @@
             <a:fld id="{B61BEF0D-F0BB-DE4B-95CE-6DB70DBA9567}" type="datetimeFigureOut">
               <a:rPr lang="en-US" smtClean="0"/>
               <a:pPr/>
-              <a:t>2/27/26</a:t>
+              <a:t>4/21/26</a:t>
             </a:fld>
             <a:endParaRPr lang="en-US" dirty="0"/>
           </a:p>
@@ -3159,7 +3380,7 @@
             <a:fld id="{B61BEF0D-F0BB-DE4B-95CE-6DB70DBA9567}" type="datetimeFigureOut">
               <a:rPr lang="en-US" smtClean="0"/>
               <a:pPr/>
-              <a:t>2/27/26</a:t>
+              <a:t>4/21/26</a:t>
             </a:fld>
             <a:endParaRPr lang="en-US" dirty="0"/>
           </a:p>
@@ -3539,7 +3760,7 @@
             <a:fld id="{B61BEF0D-F0BB-DE4B-95CE-6DB70DBA9567}" type="datetimeFigureOut">
               <a:rPr lang="en-US" smtClean="0"/>
               <a:pPr/>
-              <a:t>2/27/26</a:t>
+              <a:t>4/21/26</a:t>
             </a:fld>
             <a:endParaRPr lang="en-US" dirty="0"/>
           </a:p>
@@ -3830,7 +4051,7 @@
             <a:fld id="{B61BEF0D-F0BB-DE4B-95CE-6DB70DBA9567}" type="datetimeFigureOut">
               <a:rPr lang="en-US" smtClean="0"/>
               <a:pPr/>
-              <a:t>2/27/26</a:t>
+              <a:t>4/21/26</a:t>
             </a:fld>
             <a:endParaRPr lang="en-US" dirty="0"/>
           </a:p>
@@ -4043,7 +4264,7 @@
             <a:fld id="{B61BEF0D-F0BB-DE4B-95CE-6DB70DBA9567}" type="datetimeFigureOut">
               <a:rPr lang="en-US" smtClean="0"/>
               <a:pPr/>
-              <a:t>2/27/26</a:t>
+              <a:t>4/21/26</a:t>
             </a:fld>
             <a:endParaRPr lang="en-US" dirty="0"/>
           </a:p>
@@ -4807,6 +5028,12 @@
           <a:p>
             <a:r>
               <a:rPr lang="en-US" sz="2400" dirty="0"/>
+              <a:t>Warm up</a:t>
+            </a:r>
+          </a:p>
+          <a:p>
+            <a:r>
+              <a:rPr lang="en-US" sz="2400" dirty="0"/>
               <a:t>Intro to “</a:t>
             </a:r>
             <a:r>
@@ -4829,8 +5056,13 @@
           <a:p>
             <a:r>
               <a:rPr lang="en-US" sz="2400" dirty="0"/>
-              <a:t>Create your own </a:t>
-            </a:r>
+              <a:t>Create your </a:t>
+            </a:r>
+            <a:r>
+              <a:rPr lang="en-US" sz="2400"/>
+              <a:t>own </a:t>
+            </a:r>
+            <a:endParaRPr lang="en-US" sz="2400" dirty="0"/>
           </a:p>
           <a:p>
             <a:endParaRPr lang="en-US" sz="2400" dirty="0"/>
@@ -4851,6 +5083,314 @@
 </file>
 
 <file path=ppt/slides/slide3.xml><?xml version="1.0" encoding="utf-8"?>
+<p:sld xmlns:a="http://schemas.openxmlformats.org/drawingml/2006/main" xmlns:r="http://schemas.openxmlformats.org/officeDocument/2006/relationships" xmlns:p="http://schemas.openxmlformats.org/presentationml/2006/main">
+  <p:cSld>
+    <p:spTree>
+      <p:nvGrpSpPr>
+        <p:cNvPr id="1" name="">
+          <a:extLst>
+            <a:ext uri="{FF2B5EF4-FFF2-40B4-BE49-F238E27FC236}">
+              <a16:creationId xmlns:a16="http://schemas.microsoft.com/office/drawing/2014/main" id="{FFC3D80C-80A3-241F-D90D-2B3C0EAB889E}"/>
+            </a:ext>
+          </a:extLst>
+        </p:cNvPr>
+        <p:cNvGrpSpPr/>
+        <p:nvPr/>
+      </p:nvGrpSpPr>
+      <p:grpSpPr>
+        <a:xfrm>
+          <a:off x="0" y="0"/>
+          <a:ext cx="0" cy="0"/>
+          <a:chOff x="0" y="0"/>
+          <a:chExt cx="0" cy="0"/>
+        </a:xfrm>
+      </p:grpSpPr>
+      <p:sp>
+        <p:nvSpPr>
+          <p:cNvPr id="2" name="Title 1">
+            <a:extLst>
+              <a:ext uri="{FF2B5EF4-FFF2-40B4-BE49-F238E27FC236}">
+                <a16:creationId xmlns:a16="http://schemas.microsoft.com/office/drawing/2014/main" id="{88D6EE0E-9E24-6595-D4A5-AB1E46791393}"/>
+              </a:ext>
+            </a:extLst>
+          </p:cNvPr>
+          <p:cNvSpPr>
+            <a:spLocks noGrp="1"/>
+          </p:cNvSpPr>
+          <p:nvPr>
+            <p:ph type="title"/>
+          </p:nvPr>
+        </p:nvSpPr>
+        <p:spPr/>
+        <p:txBody>
+          <a:bodyPr/>
+          <a:lstStyle/>
+          <a:p>
+            <a:r>
+              <a:rPr lang="en-US" dirty="0"/>
+              <a:t>Warm up</a:t>
+            </a:r>
+          </a:p>
+        </p:txBody>
+      </p:sp>
+      <p:sp>
+        <p:nvSpPr>
+          <p:cNvPr id="3" name="Content Placeholder 2">
+            <a:extLst>
+              <a:ext uri="{FF2B5EF4-FFF2-40B4-BE49-F238E27FC236}">
+                <a16:creationId xmlns:a16="http://schemas.microsoft.com/office/drawing/2014/main" id="{3743E8CF-CB10-9B53-0F24-5578D39CDD8F}"/>
+              </a:ext>
+            </a:extLst>
+          </p:cNvPr>
+          <p:cNvSpPr>
+            <a:spLocks noGrp="1"/>
+          </p:cNvSpPr>
+          <p:nvPr>
+            <p:ph idx="1"/>
+          </p:nvPr>
+        </p:nvSpPr>
+        <p:spPr/>
+        <p:txBody>
+          <a:bodyPr anchor="t">
+            <a:noAutofit/>
+          </a:bodyPr>
+          <a:lstStyle/>
+          <a:p>
+            <a:r>
+              <a:rPr lang="en-US" sz="2400" dirty="0"/>
+              <a:t>What is the design space for XAI? </a:t>
+            </a:r>
+          </a:p>
+          <a:p>
+            <a:endParaRPr lang="en-US" sz="2400" dirty="0"/>
+          </a:p>
+          <a:p>
+            <a:r>
+              <a:rPr lang="en-US" sz="2400" dirty="0"/>
+              <a:t>What is one XAI visualization technique we looked at last class? </a:t>
+            </a:r>
+          </a:p>
+          <a:p>
+            <a:endParaRPr lang="en-US" sz="2400" dirty="0"/>
+          </a:p>
+          <a:p>
+            <a:r>
+              <a:rPr lang="en-US" sz="2400" dirty="0"/>
+              <a:t>What is an open area in XAI research? </a:t>
+            </a:r>
+          </a:p>
+          <a:p>
+            <a:endParaRPr lang="en-US" sz="2400" dirty="0"/>
+          </a:p>
+        </p:txBody>
+      </p:sp>
+    </p:spTree>
+    <p:extLst>
+      <p:ext uri="{BB962C8B-B14F-4D97-AF65-F5344CB8AC3E}">
+        <p14:creationId xmlns:p14="http://schemas.microsoft.com/office/powerpoint/2010/main" val="1919439994"/>
+      </p:ext>
+    </p:extLst>
+  </p:cSld>
+  <p:clrMapOvr>
+    <a:masterClrMapping/>
+  </p:clrMapOvr>
+</p:sld>
+</file>
+
+<file path=ppt/slides/slide4.xml><?xml version="1.0" encoding="utf-8"?>
+<p:sld xmlns:a="http://schemas.openxmlformats.org/drawingml/2006/main" xmlns:r="http://schemas.openxmlformats.org/officeDocument/2006/relationships" xmlns:p="http://schemas.openxmlformats.org/presentationml/2006/main">
+  <p:cSld>
+    <p:spTree>
+      <p:nvGrpSpPr>
+        <p:cNvPr id="1" name="">
+          <a:extLst>
+            <a:ext uri="{FF2B5EF4-FFF2-40B4-BE49-F238E27FC236}">
+              <a16:creationId xmlns:a16="http://schemas.microsoft.com/office/drawing/2014/main" id="{FD1751E0-B042-C3D8-E9C5-A228E6DE8BD0}"/>
+            </a:ext>
+          </a:extLst>
+        </p:cNvPr>
+        <p:cNvGrpSpPr/>
+        <p:nvPr/>
+      </p:nvGrpSpPr>
+      <p:grpSpPr>
+        <a:xfrm>
+          <a:off x="0" y="0"/>
+          <a:ext cx="0" cy="0"/>
+          <a:chOff x="0" y="0"/>
+          <a:chExt cx="0" cy="0"/>
+        </a:xfrm>
+      </p:grpSpPr>
+      <p:sp>
+        <p:nvSpPr>
+          <p:cNvPr id="2" name="Title 1">
+            <a:extLst>
+              <a:ext uri="{FF2B5EF4-FFF2-40B4-BE49-F238E27FC236}">
+                <a16:creationId xmlns:a16="http://schemas.microsoft.com/office/drawing/2014/main" id="{E98B831B-A422-10BC-6F2F-3FCA2C81FEB8}"/>
+              </a:ext>
+            </a:extLst>
+          </p:cNvPr>
+          <p:cNvSpPr>
+            <a:spLocks noGrp="1"/>
+          </p:cNvSpPr>
+          <p:nvPr>
+            <p:ph type="title"/>
+          </p:nvPr>
+        </p:nvSpPr>
+        <p:spPr/>
+        <p:txBody>
+          <a:bodyPr/>
+          <a:lstStyle/>
+          <a:p>
+            <a:r>
+              <a:rPr lang="en-US" dirty="0" err="1"/>
+              <a:t>xai</a:t>
+            </a:r>
+            <a:r>
+              <a:rPr lang="en-US" dirty="0"/>
+              <a:t> and Visualization: design space</a:t>
+            </a:r>
+          </a:p>
+        </p:txBody>
+      </p:sp>
+      <p:pic>
+        <p:nvPicPr>
+          <p:cNvPr id="7" name="Content Placeholder 6" descr="A diagram of a software development&#10;&#10;AI-generated content may be incorrect.">
+            <a:extLst>
+              <a:ext uri="{FF2B5EF4-FFF2-40B4-BE49-F238E27FC236}">
+                <a16:creationId xmlns:a16="http://schemas.microsoft.com/office/drawing/2014/main" id="{79643AEE-38C7-50A0-8BAE-D834D9D8DBD9}"/>
+              </a:ext>
+            </a:extLst>
+          </p:cNvPr>
+          <p:cNvPicPr>
+            <a:picLocks noGrp="1" noChangeAspect="1"/>
+          </p:cNvPicPr>
+          <p:nvPr>
+            <p:ph idx="1"/>
+          </p:nvPr>
+        </p:nvPicPr>
+        <p:blipFill>
+          <a:blip r:embed="rId3"/>
+          <a:stretch>
+            <a:fillRect/>
+          </a:stretch>
+        </p:blipFill>
+        <p:spPr>
+          <a:xfrm>
+            <a:off x="1399670" y="1879421"/>
+            <a:ext cx="9392660" cy="4276423"/>
+          </a:xfrm>
+          <a:prstGeom prst="rect">
+            <a:avLst/>
+          </a:prstGeom>
+        </p:spPr>
+      </p:pic>
+      <p:sp>
+        <p:nvSpPr>
+          <p:cNvPr id="8" name="TextBox 7">
+            <a:extLst>
+              <a:ext uri="{FF2B5EF4-FFF2-40B4-BE49-F238E27FC236}">
+                <a16:creationId xmlns:a16="http://schemas.microsoft.com/office/drawing/2014/main" id="{6121A214-7C26-4495-6247-8ECBAF744113}"/>
+              </a:ext>
+            </a:extLst>
+          </p:cNvPr>
+          <p:cNvSpPr txBox="1"/>
+          <p:nvPr/>
+        </p:nvSpPr>
+        <p:spPr>
+          <a:xfrm>
+            <a:off x="6248400" y="6155844"/>
+            <a:ext cx="6294120" cy="584775"/>
+          </a:xfrm>
+          <a:prstGeom prst="rect">
+            <a:avLst/>
+          </a:prstGeom>
+          <a:noFill/>
+        </p:spPr>
+        <p:txBody>
+          <a:bodyPr wrap="square">
+            <a:spAutoFit/>
+          </a:bodyPr>
+          <a:lstStyle/>
+          <a:p>
+            <a:r>
+              <a:rPr lang="en-US" sz="1600" b="0" i="0" dirty="0">
+                <a:solidFill>
+                  <a:srgbClr val="333333"/>
+                </a:solidFill>
+                <a:effectLst/>
+                <a:latin typeface="+mj-lt"/>
+              </a:rPr>
+              <a:t>A. </a:t>
+            </a:r>
+            <a:r>
+              <a:rPr lang="en-US" sz="1600" b="0" i="0" dirty="0" err="1">
+                <a:solidFill>
+                  <a:srgbClr val="333333"/>
+                </a:solidFill>
+                <a:effectLst/>
+                <a:latin typeface="+mj-lt"/>
+              </a:rPr>
+              <a:t>Chatzimparmpas</a:t>
+            </a:r>
+            <a:r>
+              <a:rPr lang="en-US" sz="1600" b="0" i="0" dirty="0">
+                <a:solidFill>
+                  <a:srgbClr val="333333"/>
+                </a:solidFill>
+                <a:effectLst/>
+                <a:latin typeface="+mj-lt"/>
+              </a:rPr>
+              <a:t>, "Visual Analytics for Explainable and Trustworthy Artificial Intelligence,” 2025, </a:t>
+            </a:r>
+            <a:r>
+              <a:rPr lang="en-US" sz="1600" b="0" i="0" dirty="0" err="1">
+                <a:solidFill>
+                  <a:srgbClr val="333333"/>
+                </a:solidFill>
+                <a:effectLst/>
+                <a:latin typeface="+mj-lt"/>
+              </a:rPr>
+              <a:t>doi</a:t>
+            </a:r>
+            <a:r>
+              <a:rPr lang="en-US" sz="1600" b="0" i="0" dirty="0">
+                <a:solidFill>
+                  <a:srgbClr val="333333"/>
+                </a:solidFill>
+                <a:effectLst/>
+                <a:latin typeface="+mj-lt"/>
+              </a:rPr>
+              <a:t>: 10.1109/MCG.2025.3533806</a:t>
+            </a:r>
+            <a:r>
+              <a:rPr lang="en-US" sz="1600" dirty="0">
+                <a:solidFill>
+                  <a:srgbClr val="333333"/>
+                </a:solidFill>
+                <a:latin typeface="+mj-lt"/>
+              </a:rPr>
+              <a:t> </a:t>
+            </a:r>
+            <a:endParaRPr lang="en-US" sz="1600" dirty="0">
+              <a:latin typeface="+mj-lt"/>
+            </a:endParaRPr>
+          </a:p>
+        </p:txBody>
+      </p:sp>
+    </p:spTree>
+    <p:extLst>
+      <p:ext uri="{BB962C8B-B14F-4D97-AF65-F5344CB8AC3E}">
+        <p14:creationId xmlns:p14="http://schemas.microsoft.com/office/powerpoint/2010/main" val="3078089745"/>
+      </p:ext>
+    </p:extLst>
+  </p:cSld>
+  <p:clrMapOvr>
+    <a:masterClrMapping/>
+  </p:clrMapOvr>
+</p:sld>
+</file>
+
+<file path=ppt/slides/slide5.xml><?xml version="1.0" encoding="utf-8"?>
 <p:sld xmlns:a="http://schemas.openxmlformats.org/drawingml/2006/main" xmlns:r="http://schemas.openxmlformats.org/officeDocument/2006/relationships" xmlns:p="http://schemas.openxmlformats.org/presentationml/2006/main">
   <p:cSld>
     <p:spTree>
@@ -4983,7 +5523,7 @@
 </p:sld>
 </file>
 
-<file path=ppt/slides/slide4.xml><?xml version="1.0" encoding="utf-8"?>
+<file path=ppt/slides/slide6.xml><?xml version="1.0" encoding="utf-8"?>
 <p:sld xmlns:a="http://schemas.openxmlformats.org/drawingml/2006/main" xmlns:r="http://schemas.openxmlformats.org/officeDocument/2006/relationships" xmlns:p="http://schemas.openxmlformats.org/presentationml/2006/main">
   <p:cSld>
     <p:spTree>

--- a/slides/18-XAI-lab.pptx
+++ b/slides/18-XAI-lab.pptx
@@ -5502,6 +5502,14 @@
                 <a:hlinkClick r:id="rId3"/>
               </a:rPr>
               <a:t>https://visxai.io/#hall-of-fame</a:t>
+            </a:r>
+            <a:r>
+              <a:rPr lang="en-US" sz="2400" dirty="0"/>
+              <a:t>; prepare to report back to the class what </a:t>
+            </a:r>
+            <a:r>
+              <a:rPr lang="en-US" sz="2400"/>
+              <a:t>you learned</a:t>
             </a:r>
             <a:r>
               <a:rPr lang="en-US" sz="2400" dirty="0"/>
